--- a/assets/figures-editable/c3-c4/c4-e28.pptx
+++ b/assets/figures-editable/c3-c4/c4-e28.pptx
@@ -3104,8 +3104,8 @@
         </p:nvSpPr>
         <p:spPr>
           <a:xfrm>
-            <a:off x="274320" y="137160"/>
-            <a:ext cx="11612880" cy="365760"/>
+            <a:off x="274320" y="118872"/>
+            <a:ext cx="11612880" cy="340105"/>
           </a:xfrm>
           <a:prstGeom prst="rect">
             <a:avLst/>
@@ -3114,7 +3114,7 @@
           <a:effectLst/>
         </p:spPr>
         <p:txBody>
-          <a:bodyPr wrap="square" lIns="27432" rIns="27432" tIns="18288" bIns="18288" anchor="ctr">
+          <a:bodyPr wrap="none" lIns="18288" rIns="18288" tIns="18288" bIns="18288" anchor="t">
             <a:spAutoFit/>
           </a:bodyPr>
           <a:lstStyle/>
@@ -3125,7 +3125,7 @@
               </a:spcAft>
             </a:pPr>
             <a:r>
-              <a:rPr sz="2100" b="0" i="0">
+              <a:rPr sz="1900" b="1" i="0">
                 <a:solidFill>
                   <a:srgbClr val="8EDBD4"/>
                 </a:solidFill>
@@ -3138,24 +3138,64 @@
       </p:sp>
       <p:sp>
         <p:nvSpPr>
-          <p:cNvPr id="3" name="C4-E28 rect 1" descr="sci-ppt:o001"/>
+          <p:cNvPr id="3" name="C4-E28 text 1" descr="sci-ppt:o001"/>
+          <p:cNvSpPr txBox="1"/>
+          <p:nvPr/>
+        </p:nvSpPr>
+        <p:spPr>
+          <a:xfrm>
+            <a:off x="457200" y="914400"/>
+            <a:ext cx="11247120" cy="254889"/>
+          </a:xfrm>
+          <a:prstGeom prst="rect">
+            <a:avLst/>
+          </a:prstGeom>
+          <a:noFill/>
+          <a:effectLst/>
+        </p:spPr>
+        <p:txBody>
+          <a:bodyPr wrap="none" lIns="18288" rIns="18288" tIns="18288" bIns="18288" anchor="t">
+            <a:spAutoFit/>
+          </a:bodyPr>
+          <a:lstStyle/>
+          <a:p>
+            <a:pPr algn="l">
+              <a:spcAft>
+                <a:spcPts val="0"/>
+              </a:spcAft>
+            </a:pPr>
+            <a:r>
+              <a:rPr sz="1350" b="1" i="0">
+                <a:solidFill>
+                  <a:srgbClr val="8EDBD4"/>
+                </a:solidFill>
+                <a:latin typeface="Arial"/>
+              </a:rPr>
+              <a:t>The jet that arrives at the film (inherited from Chapter 3)</a:t>
+            </a:r>
+          </a:p>
+        </p:txBody>
+      </p:sp>
+      <p:sp>
+        <p:nvSpPr>
+          <p:cNvPr id="4" name="C4-E28 rect 2" descr="sci-ppt:o002"/>
           <p:cNvSpPr/>
           <p:nvPr/>
         </p:nvSpPr>
         <p:spPr>
           <a:xfrm>
-            <a:off x="731520" y="1508760"/>
-            <a:ext cx="4937760" cy="731520"/>
+            <a:off x="731520" y="1554480"/>
+            <a:ext cx="4572000" cy="822960"/>
           </a:xfrm>
           <a:prstGeom prst="rect">
             <a:avLst/>
           </a:prstGeom>
           <a:solidFill>
-            <a:srgbClr val="213E4B"/>
+            <a:srgbClr val="1E4A5A"/>
           </a:solidFill>
-          <a:ln w="19050">
+          <a:ln w="30480">
             <a:solidFill>
-              <a:srgbClr val="B4C7D2"/>
+              <a:srgbClr val="8EDBD4"/>
             </a:solidFill>
           </a:ln>
           <a:effectLst/>
@@ -3170,21 +3210,21 @@
       </p:sp>
       <p:cxnSp>
         <p:nvCxnSpPr>
-          <p:cNvPr id="4" name="C4-E28 arrow 2" descr="sci-ppt:o002"/>
+          <p:cNvPr id="5" name="C4-E28 arrow 3" descr="sci-ppt:o003"/>
           <p:cNvCxnSpPr/>
           <p:nvPr/>
         </p:nvCxnSpPr>
         <p:spPr>
           <a:xfrm>
-            <a:off x="1005840" y="1874519"/>
-            <a:ext cx="4297680" cy="0"/>
+            <a:off x="5394960" y="1965960"/>
+            <a:ext cx="914400" cy="0"/>
           </a:xfrm>
           <a:prstGeom prst="line">
             <a:avLst/>
           </a:prstGeom>
-          <a:ln w="25400">
+          <a:ln w="50800">
             <a:solidFill>
-              <a:srgbClr val="8EDBD4"/>
+              <a:srgbClr val="F2B880"/>
             </a:solidFill>
             <a:headEnd type="none" w="med" len="med"/>
             <a:tailEnd type="triangle" w="med" len="med"/>
@@ -3192,46 +3232,6 @@
           <a:effectLst/>
         </p:spPr>
       </p:cxnSp>
-      <p:sp>
-        <p:nvSpPr>
-          <p:cNvPr id="5" name="C4-E28 text 3" descr="sci-ppt:o003"/>
-          <p:cNvSpPr txBox="1"/>
-          <p:nvPr/>
-        </p:nvSpPr>
-        <p:spPr>
-          <a:xfrm>
-            <a:off x="1463040" y="1051560"/>
-            <a:ext cx="3931920" cy="365760"/>
-          </a:xfrm>
-          <a:prstGeom prst="rect">
-            <a:avLst/>
-          </a:prstGeom>
-          <a:noFill/>
-          <a:effectLst/>
-        </p:spPr>
-        <p:txBody>
-          <a:bodyPr wrap="square" lIns="27432" rIns="27432" tIns="18288" bIns="18288" anchor="ctr">
-            <a:spAutoFit/>
-          </a:bodyPr>
-          <a:lstStyle/>
-          <a:p>
-            <a:pPr algn="l">
-              <a:spcAft>
-                <a:spcPts val="0"/>
-              </a:spcAft>
-            </a:pPr>
-            <a:r>
-              <a:rPr sz="1800" b="0" i="0">
-                <a:solidFill>
-                  <a:srgbClr val="E7F0F3"/>
-                </a:solidFill>
-                <a:latin typeface="Arial"/>
-              </a:rPr>
-              <a:t>Finite emitted liquid: m_j, E_j, U_j</a:t>
-            </a:r>
-          </a:p>
-        </p:txBody>
-      </p:sp>
       <p:cxnSp>
         <p:nvCxnSpPr>
           <p:cNvPr id="6" name="C4-E28 line 4" descr="sci-ppt:o004"/>
@@ -3240,60 +3240,42 @@
         </p:nvCxnSpPr>
         <p:spPr>
           <a:xfrm>
-            <a:off x="731520" y="2606040"/>
-            <a:ext cx="4937760" cy="0"/>
+            <a:off x="731520" y="2697480"/>
+            <a:ext cx="4572000" cy="0"/>
           </a:xfrm>
           <a:prstGeom prst="line">
             <a:avLst/>
           </a:prstGeom>
-          <a:ln w="25400">
+          <a:ln w="16510">
             <a:solidFill>
-              <a:srgbClr val="8EDBD4"/>
+              <a:srgbClr val="B4C7D2"/>
             </a:solidFill>
           </a:ln>
           <a:effectLst/>
         </p:spPr>
       </p:cxnSp>
-      <p:sp>
-        <p:nvSpPr>
-          <p:cNvPr id="7" name="C4-E28 text 5" descr="sci-ppt:o005"/>
-          <p:cNvSpPr txBox="1"/>
+      <p:cxnSp>
+        <p:nvCxnSpPr>
+          <p:cNvPr id="7" name="C4-E28 line 5" descr="sci-ppt:o005"/>
+          <p:cNvCxnSpPr/>
           <p:nvPr/>
-        </p:nvSpPr>
-        <p:spPr>
-          <a:xfrm>
-            <a:off x="2743200" y="2697480"/>
-            <a:ext cx="1828800" cy="365760"/>
-          </a:xfrm>
-          <a:prstGeom prst="rect">
+        </p:nvCxnSpPr>
+        <p:spPr>
+          <a:xfrm>
+            <a:off x="731520" y="2633472"/>
+            <a:ext cx="0" cy="128016"/>
+          </a:xfrm>
+          <a:prstGeom prst="line">
             <a:avLst/>
           </a:prstGeom>
-          <a:noFill/>
+          <a:ln w="16510">
+            <a:solidFill>
+              <a:srgbClr val="B4C7D2"/>
+            </a:solidFill>
+          </a:ln>
           <a:effectLst/>
         </p:spPr>
-        <p:txBody>
-          <a:bodyPr wrap="square" lIns="27432" rIns="27432" tIns="18288" bIns="18288" anchor="ctr">
-            <a:spAutoFit/>
-          </a:bodyPr>
-          <a:lstStyle/>
-          <a:p>
-            <a:pPr algn="l">
-              <a:spcAft>
-                <a:spcPts val="0"/>
-              </a:spcAft>
-            </a:pPr>
-            <a:r>
-              <a:rPr sz="1700" b="0" i="0">
-                <a:solidFill>
-                  <a:srgbClr val="E7F0F3"/>
-                </a:solidFill>
-                <a:latin typeface="Arial"/>
-              </a:rPr>
-              <a:t>L_j</a:t>
-            </a:r>
-          </a:p>
-        </p:txBody>
-      </p:sp>
+      </p:cxnSp>
       <p:cxnSp>
         <p:nvCxnSpPr>
           <p:cNvPr id="8" name="C4-E28 line 6" descr="sci-ppt:o006"/>
@@ -3302,30 +3284,254 @@
         </p:nvCxnSpPr>
         <p:spPr>
           <a:xfrm>
-            <a:off x="457200" y="1508760"/>
-            <a:ext cx="0" cy="731520"/>
+            <a:off x="5303520" y="2633472"/>
+            <a:ext cx="0" cy="128016"/>
           </a:xfrm>
           <a:prstGeom prst="line">
             <a:avLst/>
           </a:prstGeom>
-          <a:ln w="25400">
+          <a:ln w="16510">
+            <a:solidFill>
+              <a:srgbClr val="B4C7D2"/>
+            </a:solidFill>
+          </a:ln>
+          <a:effectLst/>
+        </p:spPr>
+      </p:cxnSp>
+      <p:sp>
+        <p:nvSpPr>
+          <p:cNvPr id="9" name="C4-E28 text 7" descr="sci-ppt:o007"/>
+          <p:cNvSpPr txBox="1"/>
+          <p:nvPr/>
+        </p:nvSpPr>
+        <p:spPr>
+          <a:xfrm>
+            <a:off x="2103120" y="2423160"/>
+            <a:ext cx="1828800" cy="231648"/>
+          </a:xfrm>
+          <a:prstGeom prst="rect">
+            <a:avLst/>
+          </a:prstGeom>
+          <a:noFill/>
+          <a:effectLst/>
+        </p:spPr>
+        <p:txBody>
+          <a:bodyPr wrap="none" lIns="18288" rIns="18288" tIns="18288" bIns="18288" anchor="t">
+            <a:spAutoFit/>
+          </a:bodyPr>
+          <a:lstStyle/>
+          <a:p>
+            <a:pPr algn="ctr">
+              <a:spcAft>
+                <a:spcPts val="0"/>
+              </a:spcAft>
+            </a:pPr>
+            <a:r>
+              <a:rPr sz="1200" b="0" i="0">
+                <a:solidFill>
+                  <a:srgbClr val="B4C7D2"/>
+                </a:solidFill>
+                <a:latin typeface="Arial"/>
+              </a:rPr>
+              <a:t>Lⱼ = 50 µm</a:t>
+            </a:r>
+          </a:p>
+        </p:txBody>
+      </p:sp>
+      <p:sp>
+        <p:nvSpPr>
+          <p:cNvPr id="10" name="C4-E28 round_rect 8" descr="sci-ppt:o008"/>
+          <p:cNvSpPr/>
+          <p:nvPr/>
+        </p:nvSpPr>
+        <p:spPr>
+          <a:xfrm>
+            <a:off x="457200" y="3108960"/>
+            <a:ext cx="2697480" cy="1920240"/>
+          </a:xfrm>
+          <a:prstGeom prst="roundRect">
+            <a:avLst/>
+          </a:prstGeom>
+          <a:solidFill>
+            <a:srgbClr val="213E4B"/>
+          </a:solidFill>
+          <a:ln w="20320">
+            <a:solidFill>
+              <a:srgbClr val="7FC8F8"/>
+            </a:solidFill>
+          </a:ln>
+          <a:effectLst/>
+        </p:spPr>
+        <p:txBody>
+          <a:bodyPr rtlCol="0" anchor="ctr"/>
+          <a:lstStyle/>
+          <a:p>
+            <a:pPr algn="ctr"/>
+          </a:p>
+        </p:txBody>
+      </p:sp>
+      <p:sp>
+        <p:nvSpPr>
+          <p:cNvPr id="11" name="C4-E28 text 9" descr="sci-ppt:o009"/>
+          <p:cNvSpPr txBox="1"/>
+          <p:nvPr/>
+        </p:nvSpPr>
+        <p:spPr>
+          <a:xfrm>
+            <a:off x="566928" y="3163824"/>
+            <a:ext cx="2478024" cy="247142"/>
+          </a:xfrm>
+          <a:prstGeom prst="rect">
+            <a:avLst/>
+          </a:prstGeom>
+          <a:noFill/>
+          <a:effectLst/>
+        </p:spPr>
+        <p:txBody>
+          <a:bodyPr wrap="none" lIns="18288" rIns="18288" tIns="18288" bIns="18288" anchor="t">
+            <a:spAutoFit/>
+          </a:bodyPr>
+          <a:lstStyle/>
+          <a:p>
+            <a:pPr algn="l">
+              <a:spcAft>
+                <a:spcPts val="0"/>
+              </a:spcAft>
+            </a:pPr>
+            <a:r>
+              <a:rPr sz="1300" b="1" i="0">
+                <a:solidFill>
+                  <a:srgbClr val="7FC8F8"/>
+                </a:solidFill>
+                <a:latin typeface="Arial"/>
+              </a:rPr>
+              <a:t>mass</a:t>
+            </a:r>
+          </a:p>
+        </p:txBody>
+      </p:sp>
+      <p:sp>
+        <p:nvSpPr>
+          <p:cNvPr id="12" name="C4-E28 text 10" descr="sci-ppt:o010"/>
+          <p:cNvSpPr txBox="1"/>
+          <p:nvPr/>
+        </p:nvSpPr>
+        <p:spPr>
+          <a:xfrm>
+            <a:off x="530352" y="3566160"/>
+            <a:ext cx="2560320" cy="223900"/>
+          </a:xfrm>
+          <a:prstGeom prst="rect">
+            <a:avLst/>
+          </a:prstGeom>
+          <a:noFill/>
+          <a:effectLst/>
+        </p:spPr>
+        <p:txBody>
+          <a:bodyPr wrap="none" lIns="18288" rIns="18288" tIns="18288" bIns="18288" anchor="t">
+            <a:spAutoFit/>
+          </a:bodyPr>
+          <a:lstStyle/>
+          <a:p>
+            <a:pPr algn="ctr">
+              <a:spcAft>
+                <a:spcPts val="0"/>
+              </a:spcAft>
+            </a:pPr>
+            <a:r>
+              <a:rPr sz="1150" b="0" i="0">
+                <a:solidFill>
+                  <a:srgbClr val="E7F0F3"/>
+                </a:solidFill>
+                <a:latin typeface="Arial"/>
+              </a:rPr>
+              <a:t>mⱼ = ρπdⱼ²Lⱼ/4</a:t>
+            </a:r>
+          </a:p>
+        </p:txBody>
+      </p:sp>
+      <p:sp>
+        <p:nvSpPr>
+          <p:cNvPr id="13" name="C4-E28 text 11" descr="sci-ppt:o011"/>
+          <p:cNvSpPr txBox="1"/>
+          <p:nvPr/>
+        </p:nvSpPr>
+        <p:spPr>
+          <a:xfrm>
+            <a:off x="530352" y="4206240"/>
+            <a:ext cx="2560320" cy="223900"/>
+          </a:xfrm>
+          <a:prstGeom prst="rect">
+            <a:avLst/>
+          </a:prstGeom>
+          <a:noFill/>
+          <a:effectLst/>
+        </p:spPr>
+        <p:txBody>
+          <a:bodyPr wrap="none" lIns="18288" rIns="18288" tIns="18288" bIns="18288" anchor="t">
+            <a:spAutoFit/>
+          </a:bodyPr>
+          <a:lstStyle/>
+          <a:p>
+            <a:pPr algn="ctr">
+              <a:spcAft>
+                <a:spcPts val="0"/>
+              </a:spcAft>
+            </a:pPr>
+            <a:r>
+              <a:rPr sz="1150" b="1" i="0">
+                <a:solidFill>
+                  <a:srgbClr val="F2B880"/>
+                </a:solidFill>
+                <a:latin typeface="Arial"/>
+              </a:rPr>
+              <a:t>3.926990817e-12 kg</a:t>
+            </a:r>
+          </a:p>
+        </p:txBody>
+      </p:sp>
+      <p:sp>
+        <p:nvSpPr>
+          <p:cNvPr id="14" name="C4-E28 round_rect 12" descr="sci-ppt:o012"/>
+          <p:cNvSpPr/>
+          <p:nvPr/>
+        </p:nvSpPr>
+        <p:spPr>
+          <a:xfrm>
+            <a:off x="3291840" y="3108960"/>
+            <a:ext cx="2697480" cy="1920240"/>
+          </a:xfrm>
+          <a:prstGeom prst="roundRect">
+            <a:avLst/>
+          </a:prstGeom>
+          <a:solidFill>
+            <a:srgbClr val="213E4B"/>
+          </a:solidFill>
+          <a:ln w="20320">
             <a:solidFill>
               <a:srgbClr val="8EDBD4"/>
             </a:solidFill>
           </a:ln>
           <a:effectLst/>
         </p:spPr>
-      </p:cxnSp>
-      <p:sp>
-        <p:nvSpPr>
-          <p:cNvPr id="9" name="C4-E28 text 7" descr="sci-ppt:o007"/>
+        <p:txBody>
+          <a:bodyPr rtlCol="0" anchor="ctr"/>
+          <a:lstStyle/>
+          <a:p>
+            <a:pPr algn="ctr"/>
+          </a:p>
+        </p:txBody>
+      </p:sp>
+      <p:sp>
+        <p:nvSpPr>
+          <p:cNvPr id="15" name="C4-E28 text 13" descr="sci-ppt:o013"/>
           <p:cNvSpPr txBox="1"/>
           <p:nvPr/>
         </p:nvSpPr>
         <p:spPr>
           <a:xfrm>
-            <a:off x="137160" y="2377440"/>
-            <a:ext cx="1645920" cy="320040"/>
+            <a:off x="3401568" y="3163824"/>
+            <a:ext cx="2478024" cy="247142"/>
           </a:xfrm>
           <a:prstGeom prst="rect">
             <a:avLst/>
@@ -3334,7 +3540,7 @@
           <a:effectLst/>
         </p:spPr>
         <p:txBody>
-          <a:bodyPr wrap="square" lIns="27432" rIns="27432" tIns="18288" bIns="18288" anchor="ctr">
+          <a:bodyPr wrap="none" lIns="18288" rIns="18288" tIns="18288" bIns="18288" anchor="t">
             <a:spAutoFit/>
           </a:bodyPr>
           <a:lstStyle/>
@@ -3345,51 +3551,67 @@
               </a:spcAft>
             </a:pPr>
             <a:r>
-              <a:rPr sz="1400" b="0" i="0">
+              <a:rPr sz="1300" b="1" i="0">
+                <a:solidFill>
+                  <a:srgbClr val="8EDBD4"/>
+                </a:solidFill>
+                <a:latin typeface="Arial"/>
+              </a:rPr>
+              <a:t>speed</a:t>
+            </a:r>
+          </a:p>
+        </p:txBody>
+      </p:sp>
+      <p:sp>
+        <p:nvSpPr>
+          <p:cNvPr id="16" name="C4-E28 text 14" descr="sci-ppt:o014"/>
+          <p:cNvSpPr txBox="1"/>
+          <p:nvPr/>
+        </p:nvSpPr>
+        <p:spPr>
+          <a:xfrm>
+            <a:off x="3364992" y="3566160"/>
+            <a:ext cx="2560320" cy="223900"/>
+          </a:xfrm>
+          <a:prstGeom prst="rect">
+            <a:avLst/>
+          </a:prstGeom>
+          <a:noFill/>
+          <a:effectLst/>
+        </p:spPr>
+        <p:txBody>
+          <a:bodyPr wrap="none" lIns="18288" rIns="18288" tIns="18288" bIns="18288" anchor="t">
+            <a:spAutoFit/>
+          </a:bodyPr>
+          <a:lstStyle/>
+          <a:p>
+            <a:pPr algn="ctr">
+              <a:spcAft>
+                <a:spcPts val="0"/>
+              </a:spcAft>
+            </a:pPr>
+            <a:r>
+              <a:rPr sz="1150" b="0" i="0">
                 <a:solidFill>
                   <a:srgbClr val="E7F0F3"/>
                 </a:solidFill>
                 <a:latin typeface="Arial"/>
               </a:rPr>
-              <a:t>d_j = 2a_j</a:t>
-            </a:r>
-          </a:p>
-        </p:txBody>
-      </p:sp>
-      <p:cxnSp>
-        <p:nvCxnSpPr>
-          <p:cNvPr id="10" name="C4-E28 arrow 8" descr="sci-ppt:o008"/>
-          <p:cNvCxnSpPr/>
-          <p:nvPr/>
-        </p:nvCxnSpPr>
-        <p:spPr>
-          <a:xfrm>
-            <a:off x="6126480" y="1874519"/>
-            <a:ext cx="4663440" cy="0"/>
-          </a:xfrm>
-          <a:prstGeom prst="line">
-            <a:avLst/>
-          </a:prstGeom>
-          <a:ln w="25400">
-            <a:solidFill>
-              <a:srgbClr val="8EDBD4"/>
-            </a:solidFill>
-            <a:headEnd type="none" w="med" len="med"/>
-            <a:tailEnd type="triangle" w="med" len="med"/>
-          </a:ln>
-          <a:effectLst/>
-        </p:spPr>
-      </p:cxnSp>
-      <p:sp>
-        <p:nvSpPr>
-          <p:cNvPr id="11" name="C4-E28 text 9" descr="sci-ppt:o009"/>
+              <a:t>Uⱼ = √(2Eⱼ/mⱼ)</a:t>
+            </a:r>
+          </a:p>
+        </p:txBody>
+      </p:sp>
+      <p:sp>
+        <p:nvSpPr>
+          <p:cNvPr id="17" name="C4-E28 text 15" descr="sci-ppt:o015"/>
           <p:cNvSpPr txBox="1"/>
           <p:nvPr/>
         </p:nvSpPr>
         <p:spPr>
           <a:xfrm>
-            <a:off x="6400800" y="1188720"/>
-            <a:ext cx="4572000" cy="731520"/>
+            <a:off x="3364992" y="4206240"/>
+            <a:ext cx="2560320" cy="223900"/>
           </a:xfrm>
           <a:prstGeom prst="rect">
             <a:avLst/>
@@ -3398,7 +3620,79 @@
           <a:effectLst/>
         </p:spPr>
         <p:txBody>
-          <a:bodyPr wrap="square" lIns="27432" rIns="27432" tIns="18288" bIns="18288" anchor="ctr">
+          <a:bodyPr wrap="none" lIns="18288" rIns="18288" tIns="18288" bIns="18288" anchor="t">
+            <a:spAutoFit/>
+          </a:bodyPr>
+          <a:lstStyle/>
+          <a:p>
+            <a:pPr algn="ctr">
+              <a:spcAft>
+                <a:spcPts val="0"/>
+              </a:spcAft>
+            </a:pPr>
+            <a:r>
+              <a:rPr sz="1150" b="1" i="0">
+                <a:solidFill>
+                  <a:srgbClr val="F2B880"/>
+                </a:solidFill>
+                <a:latin typeface="Arial"/>
+              </a:rPr>
+              <a:t>31.9153824 m/s</a:t>
+            </a:r>
+          </a:p>
+        </p:txBody>
+      </p:sp>
+      <p:sp>
+        <p:nvSpPr>
+          <p:cNvPr id="18" name="C4-E28 round_rect 16" descr="sci-ppt:o016"/>
+          <p:cNvSpPr/>
+          <p:nvPr/>
+        </p:nvSpPr>
+        <p:spPr>
+          <a:xfrm>
+            <a:off x="6126480" y="3108960"/>
+            <a:ext cx="2697480" cy="1920240"/>
+          </a:xfrm>
+          <a:prstGeom prst="roundRect">
+            <a:avLst/>
+          </a:prstGeom>
+          <a:solidFill>
+            <a:srgbClr val="213E4B"/>
+          </a:solidFill>
+          <a:ln w="20320">
+            <a:solidFill>
+              <a:srgbClr val="F2B880"/>
+            </a:solidFill>
+          </a:ln>
+          <a:effectLst/>
+        </p:spPr>
+        <p:txBody>
+          <a:bodyPr rtlCol="0" anchor="ctr"/>
+          <a:lstStyle/>
+          <a:p>
+            <a:pPr algn="ctr"/>
+          </a:p>
+        </p:txBody>
+      </p:sp>
+      <p:sp>
+        <p:nvSpPr>
+          <p:cNvPr id="19" name="C4-E28 text 17" descr="sci-ppt:o017"/>
+          <p:cNvSpPr txBox="1"/>
+          <p:nvPr/>
+        </p:nvSpPr>
+        <p:spPr>
+          <a:xfrm>
+            <a:off x="6236208" y="3163824"/>
+            <a:ext cx="2478024" cy="247142"/>
+          </a:xfrm>
+          <a:prstGeom prst="rect">
+            <a:avLst/>
+          </a:prstGeom>
+          <a:noFill/>
+          <a:effectLst/>
+        </p:spPr>
+        <p:txBody>
+          <a:bodyPr wrap="none" lIns="18288" rIns="18288" tIns="18288" bIns="18288" anchor="t">
             <a:spAutoFit/>
           </a:bodyPr>
           <a:lstStyle/>
@@ -3409,15 +3703,151 @@
               </a:spcAft>
             </a:pPr>
             <a:r>
-              <a:rPr sz="2000" b="0" i="0">
+              <a:rPr sz="1300" b="1" i="0">
+                <a:solidFill>
+                  <a:srgbClr val="F2B880"/>
+                </a:solidFill>
+                <a:latin typeface="Arial"/>
+              </a:rPr>
+              <a:t>energy</a:t>
+            </a:r>
+          </a:p>
+        </p:txBody>
+      </p:sp>
+      <p:sp>
+        <p:nvSpPr>
+          <p:cNvPr id="20" name="C4-E28 text 18" descr="sci-ppt:o018"/>
+          <p:cNvSpPr txBox="1"/>
+          <p:nvPr/>
+        </p:nvSpPr>
+        <p:spPr>
+          <a:xfrm>
+            <a:off x="6199632" y="3566160"/>
+            <a:ext cx="2560320" cy="223900"/>
+          </a:xfrm>
+          <a:prstGeom prst="rect">
+            <a:avLst/>
+          </a:prstGeom>
+          <a:noFill/>
+          <a:effectLst/>
+        </p:spPr>
+        <p:txBody>
+          <a:bodyPr wrap="none" lIns="18288" rIns="18288" tIns="18288" bIns="18288" anchor="t">
+            <a:spAutoFit/>
+          </a:bodyPr>
+          <a:lstStyle/>
+          <a:p>
+            <a:pPr algn="ctr">
+              <a:spcAft>
+                <a:spcPts val="0"/>
+              </a:spcAft>
+            </a:pPr>
+            <a:r>
+              <a:rPr sz="1150" b="0" i="0">
                 <a:solidFill>
                   <a:srgbClr val="E7F0F3"/>
                 </a:solidFill>
                 <a:latin typeface="Arial"/>
               </a:rPr>
-              <a:t>Finite mass defines speed</a:t>
-            </a:r>
-          </a:p>
+              <a:t>Eᵢₙ = N Eⱼ</a:t>
+            </a:r>
+          </a:p>
+        </p:txBody>
+      </p:sp>
+      <p:sp>
+        <p:nvSpPr>
+          <p:cNvPr id="21" name="C4-E28 text 19" descr="sci-ppt:o019"/>
+          <p:cNvSpPr txBox="1"/>
+          <p:nvPr/>
+        </p:nvSpPr>
+        <p:spPr>
+          <a:xfrm>
+            <a:off x="6199632" y="4206240"/>
+            <a:ext cx="2560320" cy="223900"/>
+          </a:xfrm>
+          <a:prstGeom prst="rect">
+            <a:avLst/>
+          </a:prstGeom>
+          <a:noFill/>
+          <a:effectLst/>
+        </p:spPr>
+        <p:txBody>
+          <a:bodyPr wrap="none" lIns="18288" rIns="18288" tIns="18288" bIns="18288" anchor="t">
+            <a:spAutoFit/>
+          </a:bodyPr>
+          <a:lstStyle/>
+          <a:p>
+            <a:pPr algn="ctr">
+              <a:spcAft>
+                <a:spcPts val="0"/>
+              </a:spcAft>
+            </a:pPr>
+            <a:r>
+              <a:rPr sz="1150" b="1" i="0">
+                <a:solidFill>
+                  <a:srgbClr val="F2B880"/>
+                </a:solidFill>
+                <a:latin typeface="Arial"/>
+              </a:rPr>
+              <a:t>50.0 nJ</a:t>
+            </a:r>
+          </a:p>
+        </p:txBody>
+      </p:sp>
+      <p:sp>
+        <p:nvSpPr>
+          <p:cNvPr id="22" name="C4-E28 round_rect 20" descr="sci-ppt:o020"/>
+          <p:cNvSpPr/>
+          <p:nvPr/>
+        </p:nvSpPr>
+        <p:spPr>
+          <a:xfrm>
+            <a:off x="8961120" y="3108960"/>
+            <a:ext cx="2697480" cy="1920240"/>
+          </a:xfrm>
+          <a:prstGeom prst="roundRect">
+            <a:avLst/>
+          </a:prstGeom>
+          <a:solidFill>
+            <a:srgbClr val="213E4B"/>
+          </a:solidFill>
+          <a:ln w="20320">
+            <a:solidFill>
+              <a:srgbClr val="F28BA0"/>
+            </a:solidFill>
+          </a:ln>
+          <a:effectLst/>
+        </p:spPr>
+        <p:txBody>
+          <a:bodyPr rtlCol="0" anchor="ctr"/>
+          <a:lstStyle/>
+          <a:p>
+            <a:pPr algn="ctr"/>
+          </a:p>
+        </p:txBody>
+      </p:sp>
+      <p:sp>
+        <p:nvSpPr>
+          <p:cNvPr id="23" name="C4-E28 text 21" descr="sci-ppt:o021"/>
+          <p:cNvSpPr txBox="1"/>
+          <p:nvPr/>
+        </p:nvSpPr>
+        <p:spPr>
+          <a:xfrm>
+            <a:off x="9070848" y="3163824"/>
+            <a:ext cx="2478024" cy="247142"/>
+          </a:xfrm>
+          <a:prstGeom prst="rect">
+            <a:avLst/>
+          </a:prstGeom>
+          <a:noFill/>
+          <a:effectLst/>
+        </p:spPr>
+        <p:txBody>
+          <a:bodyPr wrap="none" lIns="18288" rIns="18288" tIns="18288" bIns="18288" anchor="t">
+            <a:spAutoFit/>
+          </a:bodyPr>
+          <a:lstStyle/>
           <a:p>
             <a:pPr algn="l">
               <a:spcAft>
@@ -3425,27 +3855,67 @@
               </a:spcAft>
             </a:pPr>
             <a:r>
-              <a:rPr sz="2000" b="0" i="0">
+              <a:rPr sz="1300" b="1" i="0">
+                <a:solidFill>
+                  <a:srgbClr val="F28BA0"/>
+                </a:solidFill>
+                <a:latin typeface="Arial"/>
+              </a:rPr>
+              <a:t>momentum</a:t>
+            </a:r>
+          </a:p>
+        </p:txBody>
+      </p:sp>
+      <p:sp>
+        <p:nvSpPr>
+          <p:cNvPr id="24" name="C4-E28 text 22" descr="sci-ppt:o022"/>
+          <p:cNvSpPr txBox="1"/>
+          <p:nvPr/>
+        </p:nvSpPr>
+        <p:spPr>
+          <a:xfrm>
+            <a:off x="9034272" y="3566160"/>
+            <a:ext cx="2560320" cy="223900"/>
+          </a:xfrm>
+          <a:prstGeom prst="rect">
+            <a:avLst/>
+          </a:prstGeom>
+          <a:noFill/>
+          <a:effectLst/>
+        </p:spPr>
+        <p:txBody>
+          <a:bodyPr wrap="none" lIns="18288" rIns="18288" tIns="18288" bIns="18288" anchor="t">
+            <a:spAutoFit/>
+          </a:bodyPr>
+          <a:lstStyle/>
+          <a:p>
+            <a:pPr algn="ctr">
+              <a:spcAft>
+                <a:spcPts val="0"/>
+              </a:spcAft>
+            </a:pPr>
+            <a:r>
+              <a:rPr sz="1150" b="0" i="0">
                 <a:solidFill>
                   <a:srgbClr val="E7F0F3"/>
                 </a:solidFill>
                 <a:latin typeface="Arial"/>
               </a:rPr>
-              <a:t>and useful momentum.</a:t>
-            </a:r>
-          </a:p>
-        </p:txBody>
-      </p:sp>
-      <p:sp>
-        <p:nvSpPr>
-          <p:cNvPr id="12" name="C4-E28 text 10" descr="sci-ppt:o010"/>
+              <a:t>Iᵢₙ = N mⱼ Uⱼ</a:t>
+            </a:r>
+          </a:p>
+        </p:txBody>
+      </p:sp>
+      <p:sp>
+        <p:nvSpPr>
+          <p:cNvPr id="25" name="C4-E28 text 23" descr="sci-ppt:o023"/>
           <p:cNvSpPr txBox="1"/>
           <p:nvPr/>
         </p:nvSpPr>
         <p:spPr>
           <a:xfrm>
-            <a:off x="6400800" y="2377440"/>
-            <a:ext cx="4572000" cy="731520"/>
+            <a:off x="9034272" y="4206240"/>
+            <a:ext cx="2560320" cy="223900"/>
           </a:xfrm>
           <a:prstGeom prst="rect">
             <a:avLst/>
@@ -3454,7 +3924,47 @@
           <a:effectLst/>
         </p:spPr>
         <p:txBody>
-          <a:bodyPr wrap="square" lIns="27432" rIns="27432" tIns="18288" bIns="18288" anchor="ctr">
+          <a:bodyPr wrap="none" lIns="18288" rIns="18288" tIns="18288" bIns="18288" anchor="t">
+            <a:spAutoFit/>
+          </a:bodyPr>
+          <a:lstStyle/>
+          <a:p>
+            <a:pPr algn="ctr">
+              <a:spcAft>
+                <a:spcPts val="0"/>
+              </a:spcAft>
+            </a:pPr>
+            <a:r>
+              <a:rPr sz="1150" b="1" i="0">
+                <a:solidFill>
+                  <a:srgbClr val="F2B880"/>
+                </a:solidFill>
+                <a:latin typeface="Arial"/>
+              </a:rPr>
+              <a:t>3.133285343e-09 N s</a:t>
+            </a:r>
+          </a:p>
+        </p:txBody>
+      </p:sp>
+      <p:sp>
+        <p:nvSpPr>
+          <p:cNvPr id="26" name="C4-E28 text 24" descr="sci-ppt:o024"/>
+          <p:cNvSpPr txBox="1"/>
+          <p:nvPr/>
+        </p:nvSpPr>
+        <p:spPr>
+          <a:xfrm>
+            <a:off x="6583680" y="1645920"/>
+            <a:ext cx="5212080" cy="239395"/>
+          </a:xfrm>
+          <a:prstGeom prst="rect">
+            <a:avLst/>
+          </a:prstGeom>
+          <a:noFill/>
+          <a:effectLst/>
+        </p:spPr>
+        <p:txBody>
+          <a:bodyPr wrap="none" lIns="18288" rIns="18288" tIns="18288" bIns="18288" anchor="t">
             <a:spAutoFit/>
           </a:bodyPr>
           <a:lstStyle/>
@@ -3465,15 +3975,39 @@
               </a:spcAft>
             </a:pPr>
             <a:r>
-              <a:rPr sz="2000" b="0" i="0">
+              <a:rPr sz="1250" b="0" i="0">
                 <a:solidFill>
-                  <a:srgbClr val="8EDBD4"/>
+                  <a:srgbClr val="E7F0F3"/>
                 </a:solidFill>
                 <a:latin typeface="Arial"/>
               </a:rPr>
-              <a:t>P_j² ≤ 2 m_j E_j</a:t>
-            </a:r>
-          </a:p>
+              <a:t>N = 25 jets, Eⱼ = 2 nJ each, ρ = 1000 kg/m³, dⱼ = 10 µm.</a:t>
+            </a:r>
+          </a:p>
+        </p:txBody>
+      </p:sp>
+      <p:sp>
+        <p:nvSpPr>
+          <p:cNvPr id="27" name="C4-E28 text 25" descr="sci-ppt:o025"/>
+          <p:cNvSpPr txBox="1"/>
+          <p:nvPr/>
+        </p:nvSpPr>
+        <p:spPr>
+          <a:xfrm>
+            <a:off x="457200" y="5303520"/>
+            <a:ext cx="11247120" cy="247142"/>
+          </a:xfrm>
+          <a:prstGeom prst="rect">
+            <a:avLst/>
+          </a:prstGeom>
+          <a:noFill/>
+          <a:effectLst/>
+        </p:spPr>
+        <p:txBody>
+          <a:bodyPr wrap="none" lIns="18288" rIns="18288" tIns="18288" bIns="18288" anchor="t">
+            <a:spAutoFit/>
+          </a:bodyPr>
+          <a:lstStyle/>
           <a:p>
             <a:pPr algn="l">
               <a:spcAft>
@@ -3481,49 +4015,27 @@
               </a:spcAft>
             </a:pPr>
             <a:r>
-              <a:rPr sz="2000" b="0" i="0">
+              <a:rPr sz="1300" b="0" i="0">
                 <a:solidFill>
-                  <a:srgbClr val="8EDBD4"/>
+                  <a:srgbClr val="F2B880"/>
                 </a:solidFill>
                 <a:latin typeface="Arial"/>
               </a:rPr>
-              <a:t>E_j ≤ E_avail</a:t>
-            </a:r>
-          </a:p>
-        </p:txBody>
-      </p:sp>
-      <p:cxnSp>
-        <p:nvCxnSpPr>
-          <p:cNvPr id="13" name="C4-E28 line 11" descr="sci-ppt:o011"/>
-          <p:cNvCxnSpPr/>
-          <p:nvPr/>
-        </p:nvCxnSpPr>
-        <p:spPr>
-          <a:xfrm>
-            <a:off x="274320" y="3977639"/>
-            <a:ext cx="11612880" cy="0"/>
-          </a:xfrm>
-          <a:prstGeom prst="line">
-            <a:avLst/>
-          </a:prstGeom>
-          <a:ln w="12700">
-            <a:solidFill>
-              <a:srgbClr val="405967"/>
-            </a:solidFill>
-          </a:ln>
-          <a:effectLst/>
-        </p:spPr>
-      </p:cxnSp>
-      <p:sp>
-        <p:nvSpPr>
-          <p:cNvPr id="14" name="C4-E28 text 12" descr="sci-ppt:o012"/>
+              <a:t>The input to the solid is a finite energy and an aligned momentum, not a pressure peak.</a:t>
+            </a:r>
+          </a:p>
+        </p:txBody>
+      </p:sp>
+      <p:sp>
+        <p:nvSpPr>
+          <p:cNvPr id="28" name="C4-E28 text 26" descr="sci-ppt:o026"/>
           <p:cNvSpPr txBox="1"/>
           <p:nvPr/>
         </p:nvSpPr>
         <p:spPr>
           <a:xfrm>
-            <a:off x="320040" y="4096512"/>
-            <a:ext cx="5715000" cy="246888"/>
+            <a:off x="457200" y="5806440"/>
+            <a:ext cx="11247120" cy="231648"/>
           </a:xfrm>
           <a:prstGeom prst="rect">
             <a:avLst/>
@@ -3532,7 +4044,7 @@
           <a:effectLst/>
         </p:spPr>
         <p:txBody>
-          <a:bodyPr wrap="square" lIns="27432" rIns="27432" tIns="18288" bIns="18288" anchor="ctr">
+          <a:bodyPr wrap="none" lIns="18288" rIns="18288" tIns="18288" bIns="18288" anchor="t">
             <a:spAutoFit/>
           </a:bodyPr>
           <a:lstStyle/>
@@ -3543,27 +4055,27 @@
               </a:spcAft>
             </a:pPr>
             <a:r>
-              <a:rPr sz="1150" b="0" i="0">
+              <a:rPr sz="1200" b="0" i="0">
                 <a:solidFill>
                   <a:srgbClr val="B4C7D2"/>
                 </a:solidFill>
                 <a:latin typeface="Arial"/>
               </a:rPr>
-              <a:t>• N = 25 — independent cells</a:t>
-            </a:r>
-          </a:p>
-        </p:txBody>
-      </p:sp>
-      <p:sp>
-        <p:nvSpPr>
-          <p:cNvPr id="15" name="C4-E28 text 13" descr="sci-ppt:o013"/>
+              <a:t>Assumes all 25 jets are activated, aligned and identical (Chapter 3 teaching state).</a:t>
+            </a:r>
+          </a:p>
+        </p:txBody>
+      </p:sp>
+      <p:sp>
+        <p:nvSpPr>
+          <p:cNvPr id="29" name="C4-E28 text 27" descr="sci-ppt:o027"/>
           <p:cNvSpPr txBox="1"/>
           <p:nvPr/>
         </p:nvSpPr>
         <p:spPr>
           <a:xfrm>
-            <a:off x="6217920" y="4096512"/>
-            <a:ext cx="5715000" cy="246888"/>
+            <a:off x="320040" y="6510528"/>
+            <a:ext cx="11521440" cy="200660"/>
           </a:xfrm>
           <a:prstGeom prst="rect">
             <a:avLst/>
@@ -3572,327 +4084,7 @@
           <a:effectLst/>
         </p:spPr>
         <p:txBody>
-          <a:bodyPr wrap="square" lIns="27432" rIns="27432" tIns="18288" bIns="18288" anchor="ctr">
-            <a:spAutoFit/>
-          </a:bodyPr>
-          <a:lstStyle/>
-          <a:p>
-            <a:pPr algn="l">
-              <a:spcAft>
-                <a:spcPts val="0"/>
-              </a:spcAft>
-            </a:pPr>
-            <a:r>
-              <a:rPr sz="1150" b="0" i="0">
-                <a:solidFill>
-                  <a:srgbClr val="B4C7D2"/>
-                </a:solidFill>
-                <a:latin typeface="Arial"/>
-              </a:rPr>
-              <a:t>• d_j = 10 μm</a:t>
-            </a:r>
-          </a:p>
-        </p:txBody>
-      </p:sp>
-      <p:sp>
-        <p:nvSpPr>
-          <p:cNvPr id="16" name="C4-E28 text 14" descr="sci-ppt:o014"/>
-          <p:cNvSpPr txBox="1"/>
-          <p:nvPr/>
-        </p:nvSpPr>
-        <p:spPr>
-          <a:xfrm>
-            <a:off x="320040" y="4329684"/>
-            <a:ext cx="5715000" cy="246888"/>
-          </a:xfrm>
-          <a:prstGeom prst="rect">
-            <a:avLst/>
-          </a:prstGeom>
-          <a:noFill/>
-          <a:effectLst/>
-        </p:spPr>
-        <p:txBody>
-          <a:bodyPr wrap="square" lIns="27432" rIns="27432" tIns="18288" bIns="18288" anchor="ctr">
-            <a:spAutoFit/>
-          </a:bodyPr>
-          <a:lstStyle/>
-          <a:p>
-            <a:pPr algn="l">
-              <a:spcAft>
-                <a:spcPts val="0"/>
-              </a:spcAft>
-            </a:pPr>
-            <a:r>
-              <a:rPr sz="1150" b="0" i="0">
-                <a:solidFill>
-                  <a:srgbClr val="B4C7D2"/>
-                </a:solidFill>
-                <a:latin typeface="Arial"/>
-              </a:rPr>
-              <a:t>• L_j = 50 μm</a:t>
-            </a:r>
-          </a:p>
-        </p:txBody>
-      </p:sp>
-      <p:sp>
-        <p:nvSpPr>
-          <p:cNvPr id="17" name="C4-E28 text 15" descr="sci-ppt:o015"/>
-          <p:cNvSpPr txBox="1"/>
-          <p:nvPr/>
-        </p:nvSpPr>
-        <p:spPr>
-          <a:xfrm>
-            <a:off x="6217920" y="4329684"/>
-            <a:ext cx="5715000" cy="246888"/>
-          </a:xfrm>
-          <a:prstGeom prst="rect">
-            <a:avLst/>
-          </a:prstGeom>
-          <a:noFill/>
-          <a:effectLst/>
-        </p:spPr>
-        <p:txBody>
-          <a:bodyPr wrap="square" lIns="27432" rIns="27432" tIns="18288" bIns="18288" anchor="ctr">
-            <a:spAutoFit/>
-          </a:bodyPr>
-          <a:lstStyle/>
-          <a:p>
-            <a:pPr algn="l">
-              <a:spcAft>
-                <a:spcPts val="0"/>
-              </a:spcAft>
-            </a:pPr>
-            <a:r>
-              <a:rPr sz="1150" b="0" i="0">
-                <a:solidFill>
-                  <a:srgbClr val="B4C7D2"/>
-                </a:solidFill>
-                <a:latin typeface="Arial"/>
-              </a:rPr>
-              <a:t>• ρ = 1000 kg/m³ → m_j</a:t>
-            </a:r>
-          </a:p>
-        </p:txBody>
-      </p:sp>
-      <p:sp>
-        <p:nvSpPr>
-          <p:cNvPr id="18" name="C4-E28 text 16" descr="sci-ppt:o016"/>
-          <p:cNvSpPr txBox="1"/>
-          <p:nvPr/>
-        </p:nvSpPr>
-        <p:spPr>
-          <a:xfrm>
-            <a:off x="320040" y="4562856"/>
-            <a:ext cx="5715000" cy="246888"/>
-          </a:xfrm>
-          <a:prstGeom prst="rect">
-            <a:avLst/>
-          </a:prstGeom>
-          <a:noFill/>
-          <a:effectLst/>
-        </p:spPr>
-        <p:txBody>
-          <a:bodyPr wrap="square" lIns="27432" rIns="27432" tIns="18288" bIns="18288" anchor="ctr">
-            <a:spAutoFit/>
-          </a:bodyPr>
-          <a:lstStyle/>
-          <a:p>
-            <a:pPr algn="l">
-              <a:spcAft>
-                <a:spcPts val="0"/>
-              </a:spcAft>
-            </a:pPr>
-            <a:r>
-              <a:rPr sz="1150" b="0" i="0">
-                <a:solidFill>
-                  <a:srgbClr val="B4C7D2"/>
-                </a:solidFill>
-                <a:latin typeface="Arial"/>
-              </a:rPr>
-              <a:t>• E_j = 2 nJ → U_j = 31.915 m/s</a:t>
-            </a:r>
-          </a:p>
-        </p:txBody>
-      </p:sp>
-      <p:sp>
-        <p:nvSpPr>
-          <p:cNvPr id="19" name="C4-E28 text 17" descr="sci-ppt:o017"/>
-          <p:cNvSpPr txBox="1"/>
-          <p:nvPr/>
-        </p:nvSpPr>
-        <p:spPr>
-          <a:xfrm>
-            <a:off x="6217920" y="4562856"/>
-            <a:ext cx="5715000" cy="246888"/>
-          </a:xfrm>
-          <a:prstGeom prst="rect">
-            <a:avLst/>
-          </a:prstGeom>
-          <a:noFill/>
-          <a:effectLst/>
-        </p:spPr>
-        <p:txBody>
-          <a:bodyPr wrap="square" lIns="27432" rIns="27432" tIns="18288" bIns="18288" anchor="ctr">
-            <a:spAutoFit/>
-          </a:bodyPr>
-          <a:lstStyle/>
-          <a:p>
-            <a:pPr algn="l">
-              <a:spcAft>
-                <a:spcPts val="0"/>
-              </a:spcAft>
-            </a:pPr>
-            <a:r>
-              <a:rPr sz="1150" b="0" i="0">
-                <a:solidFill>
-                  <a:srgbClr val="B4C7D2"/>
-                </a:solidFill>
-                <a:latin typeface="Arial"/>
-              </a:rPr>
-              <a:t>• E_in = 50 nJ</a:t>
-            </a:r>
-          </a:p>
-        </p:txBody>
-      </p:sp>
-      <p:sp>
-        <p:nvSpPr>
-          <p:cNvPr id="20" name="C4-E28 text 18" descr="sci-ppt:o018"/>
-          <p:cNvSpPr txBox="1"/>
-          <p:nvPr/>
-        </p:nvSpPr>
-        <p:spPr>
-          <a:xfrm>
-            <a:off x="320040" y="4796028"/>
-            <a:ext cx="5715000" cy="246888"/>
-          </a:xfrm>
-          <a:prstGeom prst="rect">
-            <a:avLst/>
-          </a:prstGeom>
-          <a:noFill/>
-          <a:effectLst/>
-        </p:spPr>
-        <p:txBody>
-          <a:bodyPr wrap="square" lIns="27432" rIns="27432" tIns="18288" bIns="18288" anchor="ctr">
-            <a:spAutoFit/>
-          </a:bodyPr>
-          <a:lstStyle/>
-          <a:p>
-            <a:pPr algn="l">
-              <a:spcAft>
-                <a:spcPts val="0"/>
-              </a:spcAft>
-            </a:pPr>
-            <a:r>
-              <a:rPr sz="1150" b="0" i="0">
-                <a:solidFill>
-                  <a:srgbClr val="B4C7D2"/>
-                </a:solidFill>
-                <a:latin typeface="Arial"/>
-              </a:rPr>
-              <a:t>• I_in = 3.1333×10⁻⁹ N s</a:t>
-            </a:r>
-          </a:p>
-        </p:txBody>
-      </p:sp>
-      <p:sp>
-        <p:nvSpPr>
-          <p:cNvPr id="21" name="C4-E28 text 19" descr="sci-ppt:o019"/>
-          <p:cNvSpPr txBox="1"/>
-          <p:nvPr/>
-        </p:nvSpPr>
-        <p:spPr>
-          <a:xfrm>
-            <a:off x="320040" y="5596128"/>
-            <a:ext cx="11430000" cy="292608"/>
-          </a:xfrm>
-          <a:prstGeom prst="rect">
-            <a:avLst/>
-          </a:prstGeom>
-          <a:noFill/>
-          <a:effectLst/>
-        </p:spPr>
-        <p:txBody>
-          <a:bodyPr wrap="square" lIns="27432" rIns="27432" tIns="18288" bIns="18288" anchor="ctr">
-            <a:spAutoFit/>
-          </a:bodyPr>
-          <a:lstStyle/>
-          <a:p>
-            <a:pPr algn="l">
-              <a:spcAft>
-                <a:spcPts val="0"/>
-              </a:spcAft>
-            </a:pPr>
-            <a:r>
-              <a:rPr sz="1150" b="0" i="0">
-                <a:solidFill>
-                  <a:srgbClr val="8EDBD4"/>
-                </a:solidFill>
-                <a:latin typeface="Arial"/>
-              </a:rPr>
-              <a:t>Finite carrier mass, not PFC vapor mass.</a:t>
-            </a:r>
-          </a:p>
-        </p:txBody>
-      </p:sp>
-      <p:sp>
-        <p:nvSpPr>
-          <p:cNvPr id="22" name="C4-E28 text 20" descr="sci-ppt:o020"/>
-          <p:cNvSpPr txBox="1"/>
-          <p:nvPr/>
-        </p:nvSpPr>
-        <p:spPr>
-          <a:xfrm>
-            <a:off x="320040" y="5870448"/>
-            <a:ext cx="11430000" cy="292608"/>
-          </a:xfrm>
-          <a:prstGeom prst="rect">
-            <a:avLst/>
-          </a:prstGeom>
-          <a:noFill/>
-          <a:effectLst/>
-        </p:spPr>
-        <p:txBody>
-          <a:bodyPr wrap="square" lIns="27432" rIns="27432" tIns="18288" bIns="18288" anchor="ctr">
-            <a:spAutoFit/>
-          </a:bodyPr>
-          <a:lstStyle/>
-          <a:p>
-            <a:pPr algn="l">
-              <a:spcAft>
-                <a:spcPts val="0"/>
-              </a:spcAft>
-            </a:pPr>
-            <a:r>
-              <a:rPr sz="1150" b="0" i="0">
-                <a:solidFill>
-                  <a:srgbClr val="8EDBD4"/>
-                </a:solidFill>
-                <a:latin typeface="Arial"/>
-              </a:rPr>
-              <a:t>No additional cluster amplification factor.</a:t>
-            </a:r>
-          </a:p>
-        </p:txBody>
-      </p:sp>
-      <p:sp>
-        <p:nvSpPr>
-          <p:cNvPr id="23" name="C4-E28 text 21" descr="sci-ppt:o021"/>
-          <p:cNvSpPr txBox="1"/>
-          <p:nvPr/>
-        </p:nvSpPr>
-        <p:spPr>
-          <a:xfrm>
-            <a:off x="320040" y="6473952"/>
-            <a:ext cx="11430000" cy="256032"/>
-          </a:xfrm>
-          <a:prstGeom prst="rect">
-            <a:avLst/>
-          </a:prstGeom>
-          <a:noFill/>
-          <a:effectLst/>
-        </p:spPr>
-        <p:txBody>
-          <a:bodyPr wrap="square" lIns="27432" rIns="27432" tIns="18288" bIns="18288" anchor="ctr">
+          <a:bodyPr wrap="none" lIns="18288" rIns="18288" tIns="18288" bIns="18288" anchor="t">
             <a:spAutoFit/>
           </a:bodyPr>
           <a:lstStyle/>
@@ -3909,7 +4101,7 @@
                 </a:solidFill>
                 <a:latin typeface="Arial"/>
               </a:rPr>
-              <a:t>Model schematic; geometry is not to scale.</a:t>
+              <a:t>Inherited jet state of Eq. C4-E28.</a:t>
             </a:r>
           </a:p>
         </p:txBody>
